--- a/dist/초3/과학/생물/초3_과학_생물_01_동물의생김새와생활.pptx
+++ b/dist/초3/과학/생물/초3_과학_생물_01_동물의생김새와생활.pptx
@@ -121,13 +121,13 @@
   <p:extLst>
     <p:ext uri="{521415D9-36F7-43E2-AB2F-B90AF26B5E84}">
       <p14:sectionLst xmlns:p14="http://schemas.microsoft.com/office/powerpoint/2010/main">
-        <p14:section name="도입" id="{29438df0-b966-e2dd-58d7-80115aa4713e}">
+        <p14:section name="도입" id="{9fb10a5e-dad0-a7d6-d1f6-42c94cb34bc0}">
           <p14:sldIdLst>
             <p14:sldId id="256"/>
             <p14:sldId id="257"/>
           </p14:sldIdLst>
         </p14:section>
-        <p14:section name="개념" id="{bf21e902-56e2-e14e-8b4c-7840ad5f0b86}">
+        <p14:section name="개념" id="{76281c57-e709-7510-b18e-bb7e5e7f5aea}">
           <p14:sldIdLst>
             <p14:sldId id="258"/>
             <p14:sldId id="259"/>
@@ -137,31 +137,31 @@
             <p14:sldId id="264"/>
           </p14:sldIdLst>
         </p14:section>
-        <p14:section name="연습" id="{d977d5e4-ab3f-d7c7-770c-0c8cc641443a}">
+        <p14:section name="연습" id="{db2dde9c-94d8-5288-2595-3063fd9e682b}">
           <p14:sldIdLst>
             <p14:sldId id="263"/>
             <p14:sldId id="265"/>
             <p14:sldId id="266"/>
           </p14:sldIdLst>
         </p14:section>
-        <p14:section name="개념" id="{2ae31fc6-d39e-08f8-0ee2-0ade724fe190}">
+        <p14:section name="개념" id="{fe8f9848-3348-bf5e-1142-a8172e0715f6}">
           <p14:sldIdLst/>
         </p14:section>
-        <p14:section name="연습" id="{fea45e8d-8233-949d-8e60-3cc76887ab72}">
+        <p14:section name="연습" id="{555445a0-9b0f-619a-0dd3-a05a6999f89c}">
           <p14:sldIdLst/>
         </p14:section>
-        <p14:section name="확인" id="{4ba3cc3e-6cea-02f7-8e7d-5aae21a99ac2}">
+        <p14:section name="확인" id="{4a33e533-5bd4-5611-655f-a6b69f6e8057}">
           <p14:sldIdLst>
             <p14:sldId id="267"/>
             <p14:sldId id="268"/>
           </p14:sldIdLst>
         </p14:section>
-        <p14:section name="정리" id="{2e05311a-d3ed-09de-a560-5811d0ec330d}">
+        <p14:section name="정리" id="{605afbae-43a3-6510-7319-f9cefb2b66d9}">
           <p14:sldIdLst>
             <p14:sldId id="269"/>
           </p14:sldIdLst>
         </p14:section>
-        <p14:section name="보충" id="{f94d8626-e3c6-a431-d7c5-3405e80ab684}">
+        <p14:section name="보충" id="{70c188ee-654c-458e-c69a-c403ab2ed233}">
           <p14:sldIdLst>
             <p14:sldId id="270"/>
           </p14:sldIdLst>
